--- a/sunriseRobot/app_SunriseRobot/info/ps2_controller_map_it.pptx
+++ b/sunriseRobot/app_SunriseRobot/info/ps2_controller_map_it.pptx
@@ -264,7 +264,7 @@
           <a:p>
             <a:fld id="{60B78028-44F6-416E-B0AB-FAA3EA91683A}" type="datetimeFigureOut">
               <a:rPr lang="en-US" smtClean="0"/>
-              <a:t>8/25/2025</a:t>
+              <a:t>7/19/2026</a:t>
             </a:fld>
             <a:endParaRPr lang="en-US"/>
           </a:p>
@@ -462,7 +462,7 @@
           <a:p>
             <a:fld id="{60B78028-44F6-416E-B0AB-FAA3EA91683A}" type="datetimeFigureOut">
               <a:rPr lang="en-US" smtClean="0"/>
-              <a:t>8/25/2025</a:t>
+              <a:t>7/19/2026</a:t>
             </a:fld>
             <a:endParaRPr lang="en-US"/>
           </a:p>
@@ -670,7 +670,7 @@
           <a:p>
             <a:fld id="{60B78028-44F6-416E-B0AB-FAA3EA91683A}" type="datetimeFigureOut">
               <a:rPr lang="en-US" smtClean="0"/>
-              <a:t>8/25/2025</a:t>
+              <a:t>7/19/2026</a:t>
             </a:fld>
             <a:endParaRPr lang="en-US"/>
           </a:p>
@@ -868,7 +868,7 @@
           <a:p>
             <a:fld id="{60B78028-44F6-416E-B0AB-FAA3EA91683A}" type="datetimeFigureOut">
               <a:rPr lang="en-US" smtClean="0"/>
-              <a:t>8/25/2025</a:t>
+              <a:t>7/19/2026</a:t>
             </a:fld>
             <a:endParaRPr lang="en-US"/>
           </a:p>
@@ -1143,7 +1143,7 @@
           <a:p>
             <a:fld id="{60B78028-44F6-416E-B0AB-FAA3EA91683A}" type="datetimeFigureOut">
               <a:rPr lang="en-US" smtClean="0"/>
-              <a:t>8/25/2025</a:t>
+              <a:t>7/19/2026</a:t>
             </a:fld>
             <a:endParaRPr lang="en-US"/>
           </a:p>
@@ -1408,7 +1408,7 @@
           <a:p>
             <a:fld id="{60B78028-44F6-416E-B0AB-FAA3EA91683A}" type="datetimeFigureOut">
               <a:rPr lang="en-US" smtClean="0"/>
-              <a:t>8/25/2025</a:t>
+              <a:t>7/19/2026</a:t>
             </a:fld>
             <a:endParaRPr lang="en-US"/>
           </a:p>
@@ -1820,7 +1820,7 @@
           <a:p>
             <a:fld id="{60B78028-44F6-416E-B0AB-FAA3EA91683A}" type="datetimeFigureOut">
               <a:rPr lang="en-US" smtClean="0"/>
-              <a:t>8/25/2025</a:t>
+              <a:t>7/19/2026</a:t>
             </a:fld>
             <a:endParaRPr lang="en-US"/>
           </a:p>
@@ -1961,7 +1961,7 @@
           <a:p>
             <a:fld id="{60B78028-44F6-416E-B0AB-FAA3EA91683A}" type="datetimeFigureOut">
               <a:rPr lang="en-US" smtClean="0"/>
-              <a:t>8/25/2025</a:t>
+              <a:t>7/19/2026</a:t>
             </a:fld>
             <a:endParaRPr lang="en-US"/>
           </a:p>
@@ -2074,7 +2074,7 @@
           <a:p>
             <a:fld id="{60B78028-44F6-416E-B0AB-FAA3EA91683A}" type="datetimeFigureOut">
               <a:rPr lang="en-US" smtClean="0"/>
-              <a:t>8/25/2025</a:t>
+              <a:t>7/19/2026</a:t>
             </a:fld>
             <a:endParaRPr lang="en-US"/>
           </a:p>
@@ -2385,7 +2385,7 @@
           <a:p>
             <a:fld id="{60B78028-44F6-416E-B0AB-FAA3EA91683A}" type="datetimeFigureOut">
               <a:rPr lang="en-US" smtClean="0"/>
-              <a:t>8/25/2025</a:t>
+              <a:t>7/19/2026</a:t>
             </a:fld>
             <a:endParaRPr lang="en-US"/>
           </a:p>
@@ -2673,7 +2673,7 @@
           <a:p>
             <a:fld id="{60B78028-44F6-416E-B0AB-FAA3EA91683A}" type="datetimeFigureOut">
               <a:rPr lang="en-US" smtClean="0"/>
-              <a:t>8/25/2025</a:t>
+              <a:t>7/19/2026</a:t>
             </a:fld>
             <a:endParaRPr lang="en-US"/>
           </a:p>
@@ -2914,7 +2914,7 @@
           <a:p>
             <a:fld id="{60B78028-44F6-416E-B0AB-FAA3EA91683A}" type="datetimeFigureOut">
               <a:rPr lang="en-US" smtClean="0"/>
-              <a:t>8/25/2025</a:t>
+              <a:t>7/19/2026</a:t>
             </a:fld>
             <a:endParaRPr lang="en-US"/>
           </a:p>
@@ -3931,6 +3931,239 @@
           </a:fontRef>
         </p:style>
       </p:cxnSp>
+      <p:sp>
+        <p:nvSpPr>
+          <p:cNvPr id="5" name="TextBox 4">
+            <a:extLst>
+              <a:ext uri="{FF2B5EF4-FFF2-40B4-BE49-F238E27FC236}">
+                <a16:creationId xmlns:a16="http://schemas.microsoft.com/office/drawing/2014/main" id="{7FE9EAF0-85EC-911C-55E6-C2B277C82332}"/>
+              </a:ext>
+            </a:extLst>
+          </p:cNvPr>
+          <p:cNvSpPr txBox="1"/>
+          <p:nvPr/>
+        </p:nvSpPr>
+        <p:spPr>
+          <a:xfrm>
+            <a:off x="9152785" y="3301453"/>
+            <a:ext cx="2962302" cy="2585323"/>
+          </a:xfrm>
+          <a:prstGeom prst="rect">
+            <a:avLst/>
+          </a:prstGeom>
+          <a:noFill/>
+          <a:ln w="28575">
+            <a:solidFill>
+              <a:srgbClr val="00B0F0"/>
+            </a:solidFill>
+          </a:ln>
+        </p:spPr>
+        <p:txBody>
+          <a:bodyPr wrap="square" rtlCol="0">
+            <a:spAutoFit/>
+          </a:bodyPr>
+          <a:lstStyle/>
+          <a:p>
+            <a:r>
+              <a:rPr lang="en-US" b="1" noProof="0" dirty="0"/>
+              <a:t>Push-to-talk con AI</a:t>
+            </a:r>
+            <a:r>
+              <a:rPr lang="en-US" noProof="0" dirty="0"/>
+              <a:t>: </a:t>
+            </a:r>
+            <a:r>
+              <a:rPr lang="en-US" dirty="0" err="1"/>
+              <a:t>mentre</a:t>
+            </a:r>
+            <a:r>
+              <a:rPr lang="en-US" dirty="0"/>
+              <a:t> il </a:t>
+            </a:r>
+            <a:r>
+              <a:rPr lang="en-US" dirty="0" err="1"/>
+              <a:t>pulsante</a:t>
+            </a:r>
+            <a:r>
+              <a:rPr lang="en-US" dirty="0"/>
+              <a:t> è </a:t>
+            </a:r>
+            <a:r>
+              <a:rPr lang="en-US" dirty="0" err="1"/>
+              <a:t>premuto</a:t>
+            </a:r>
+            <a:r>
+              <a:rPr lang="en-US" dirty="0"/>
+              <a:t>, il </a:t>
+            </a:r>
+            <a:r>
+              <a:rPr lang="en-US" dirty="0" err="1"/>
+              <a:t>microfono</a:t>
+            </a:r>
+            <a:r>
+              <a:rPr lang="en-US" dirty="0"/>
+              <a:t> del robot </a:t>
+            </a:r>
+            <a:r>
+              <a:rPr lang="en-US" dirty="0" err="1"/>
+              <a:t>registra</a:t>
+            </a:r>
+            <a:r>
+              <a:rPr lang="en-US" noProof="0" dirty="0"/>
+              <a:t>. Quando il </a:t>
+            </a:r>
+            <a:r>
+              <a:rPr lang="en-US" noProof="0" dirty="0" err="1"/>
+              <a:t>pulsante</a:t>
+            </a:r>
+            <a:r>
+              <a:rPr lang="en-US" noProof="0" dirty="0"/>
+              <a:t> </a:t>
+            </a:r>
+            <a:r>
+              <a:rPr lang="en-US" noProof="0" dirty="0" err="1"/>
+              <a:t>viene</a:t>
+            </a:r>
+            <a:r>
+              <a:rPr lang="en-US" noProof="0" dirty="0"/>
+              <a:t> </a:t>
+            </a:r>
+            <a:r>
+              <a:rPr lang="en-US" noProof="0" dirty="0" err="1"/>
+              <a:t>rilasciato</a:t>
+            </a:r>
+            <a:r>
+              <a:rPr lang="en-US" noProof="0" dirty="0"/>
+              <a:t>, la </a:t>
+            </a:r>
+            <a:r>
+              <a:rPr lang="en-US" noProof="0" dirty="0" err="1"/>
+              <a:t>registrazione</a:t>
+            </a:r>
+            <a:r>
+              <a:rPr lang="en-US" noProof="0" dirty="0"/>
+              <a:t> </a:t>
+            </a:r>
+            <a:r>
+              <a:rPr lang="en-US" noProof="0" dirty="0" err="1"/>
+              <a:t>viene</a:t>
+            </a:r>
+            <a:r>
+              <a:rPr lang="en-US" noProof="0" dirty="0"/>
+              <a:t> </a:t>
+            </a:r>
+            <a:r>
+              <a:rPr lang="en-US" noProof="0" dirty="0" err="1"/>
+              <a:t>inviata</a:t>
+            </a:r>
+            <a:r>
+              <a:rPr lang="en-US" noProof="0" dirty="0"/>
+              <a:t> ad </a:t>
+            </a:r>
+            <a:r>
+              <a:rPr lang="en-US" noProof="0" dirty="0" err="1"/>
+              <a:t>un’IA</a:t>
+            </a:r>
+            <a:r>
+              <a:rPr lang="en-US" noProof="0" dirty="0"/>
+              <a:t> </a:t>
+            </a:r>
+            <a:r>
+              <a:rPr lang="en-US" noProof="0" dirty="0" err="1"/>
+              <a:t>che</a:t>
+            </a:r>
+            <a:r>
+              <a:rPr lang="en-US" noProof="0" dirty="0"/>
+              <a:t> </a:t>
+            </a:r>
+            <a:r>
+              <a:rPr lang="en-US" noProof="0" dirty="0" err="1"/>
+              <a:t>può</a:t>
+            </a:r>
+            <a:r>
+              <a:rPr lang="en-US" noProof="0" dirty="0"/>
+              <a:t> </a:t>
+            </a:r>
+            <a:r>
+              <a:rPr lang="en-US" noProof="0" dirty="0" err="1"/>
+              <a:t>vedere</a:t>
+            </a:r>
+            <a:r>
+              <a:rPr lang="en-US" noProof="0" dirty="0"/>
+              <a:t> </a:t>
+            </a:r>
+            <a:r>
+              <a:rPr lang="en-US" noProof="0" dirty="0" err="1"/>
+              <a:t>dalla</a:t>
+            </a:r>
+            <a:r>
+              <a:rPr lang="en-US" noProof="0" dirty="0"/>
+              <a:t> telecamera del robot, </a:t>
+            </a:r>
+            <a:r>
+              <a:rPr lang="en-US" noProof="0" dirty="0" err="1"/>
+              <a:t>parlare</a:t>
+            </a:r>
+            <a:r>
+              <a:rPr lang="en-US" noProof="0" dirty="0"/>
+              <a:t>, e </a:t>
+            </a:r>
+            <a:r>
+              <a:rPr lang="en-US" noProof="0" dirty="0" err="1"/>
+              <a:t>muovere</a:t>
+            </a:r>
+            <a:r>
+              <a:rPr lang="en-US" noProof="0" dirty="0"/>
+              <a:t> il robot</a:t>
+            </a:r>
+          </a:p>
+        </p:txBody>
+      </p:sp>
+      <p:cxnSp>
+        <p:nvCxnSpPr>
+          <p:cNvPr id="6" name="Straight Arrow Connector 5">
+            <a:extLst>
+              <a:ext uri="{FF2B5EF4-FFF2-40B4-BE49-F238E27FC236}">
+                <a16:creationId xmlns:a16="http://schemas.microsoft.com/office/drawing/2014/main" id="{4F20B865-BA1D-E927-306D-BC1A1014BA2D}"/>
+              </a:ext>
+            </a:extLst>
+          </p:cNvPr>
+          <p:cNvCxnSpPr>
+            <a:cxnSpLocks/>
+            <a:stCxn id="5" idx="1"/>
+          </p:cNvCxnSpPr>
+          <p:nvPr/>
+        </p:nvCxnSpPr>
+        <p:spPr>
+          <a:xfrm flipH="1" flipV="1">
+            <a:off x="7862131" y="3902279"/>
+            <a:ext cx="1290654" cy="691836"/>
+          </a:xfrm>
+          <a:prstGeom prst="straightConnector1">
+            <a:avLst/>
+          </a:prstGeom>
+          <a:ln w="19050">
+            <a:solidFill>
+              <a:srgbClr val="00B0F0"/>
+            </a:solidFill>
+            <a:tailEnd type="triangle"/>
+          </a:ln>
+        </p:spPr>
+        <p:style>
+          <a:lnRef idx="2">
+            <a:schemeClr val="accent1"/>
+          </a:lnRef>
+          <a:fillRef idx="0">
+            <a:schemeClr val="accent1"/>
+          </a:fillRef>
+          <a:effectRef idx="1">
+            <a:schemeClr val="accent1"/>
+          </a:effectRef>
+          <a:fontRef idx="minor">
+            <a:schemeClr val="tx1"/>
+          </a:fontRef>
+        </p:style>
+      </p:cxnSp>
     </p:spTree>
     <p:extLst>
       <p:ext uri="{BB962C8B-B14F-4D97-AF65-F5344CB8AC3E}">
@@ -7483,10 +7716,14 @@
           <a:p>
             <a:r>
               <a:rPr lang="en-US" b="1" dirty="0"/>
-              <a:t>Y/X/B/A</a:t>
-            </a:r>
-            <a:r>
-              <a:rPr lang="en-US" dirty="0"/>
+              <a:t>Y/X</a:t>
+            </a:r>
+            <a:r>
+              <a:rPr lang="en-US" b="1"/>
+              <a:t>/B</a:t>
+            </a:r>
+            <a:r>
+              <a:rPr lang="en-US"/>
               <a:t>: </a:t>
             </a:r>
             <a:r>
@@ -8179,54 +8416,6 @@
           </a:fontRef>
         </p:style>
       </p:cxnSp>
-      <p:cxnSp>
-        <p:nvCxnSpPr>
-          <p:cNvPr id="4" name="Straight Arrow Connector 3">
-            <a:extLst>
-              <a:ext uri="{FF2B5EF4-FFF2-40B4-BE49-F238E27FC236}">
-                <a16:creationId xmlns:a16="http://schemas.microsoft.com/office/drawing/2014/main" id="{675BE492-376D-B9D6-113F-C9F4CA0295C5}"/>
-              </a:ext>
-            </a:extLst>
-          </p:cNvPr>
-          <p:cNvCxnSpPr>
-            <a:cxnSpLocks/>
-            <a:stCxn id="39" idx="1"/>
-          </p:cNvCxnSpPr>
-          <p:nvPr/>
-        </p:nvCxnSpPr>
-        <p:spPr>
-          <a:xfrm flipH="1">
-            <a:off x="7691215" y="1009681"/>
-            <a:ext cx="1205191" cy="2622270"/>
-          </a:xfrm>
-          <a:prstGeom prst="straightConnector1">
-            <a:avLst/>
-          </a:prstGeom>
-          <a:ln w="19050">
-            <a:solidFill>
-              <a:schemeClr val="accent3">
-                <a:lumMod val="60000"/>
-                <a:lumOff val="40000"/>
-              </a:schemeClr>
-            </a:solidFill>
-            <a:tailEnd type="triangle"/>
-          </a:ln>
-        </p:spPr>
-        <p:style>
-          <a:lnRef idx="2">
-            <a:schemeClr val="accent1"/>
-          </a:lnRef>
-          <a:fillRef idx="0">
-            <a:schemeClr val="accent1"/>
-          </a:fillRef>
-          <a:effectRef idx="1">
-            <a:schemeClr val="accent1"/>
-          </a:effectRef>
-          <a:fontRef idx="minor">
-            <a:schemeClr val="tx1"/>
-          </a:fontRef>
-        </p:style>
-      </p:cxnSp>
       <p:sp>
         <p:nvSpPr>
           <p:cNvPr id="12" name="TextBox 11">
@@ -8242,7 +8431,7 @@
         <p:spPr>
           <a:xfrm>
             <a:off x="9790468" y="2017888"/>
-            <a:ext cx="2357391" cy="1754326"/>
+            <a:ext cx="2357391" cy="1477328"/>
           </a:xfrm>
           <a:prstGeom prst="rect">
             <a:avLst/>
@@ -8292,7 +8481,40 @@
             </a:r>
             <a:r>
               <a:rPr lang="en-US" b="1" dirty="0"/>
-              <a:t>A</a:t>
+              <a:t>B</a:t>
+            </a:r>
+            <a:r>
+              <a:rPr lang="en-US" dirty="0"/>
+              <a:t>: </a:t>
+            </a:r>
+            <a:r>
+              <a:rPr lang="en-US" dirty="0" err="1"/>
+              <a:t>ripiegato</a:t>
+            </a:r>
+            <a:endParaRPr lang="en-US" dirty="0"/>
+          </a:p>
+          <a:p>
+            <a:r>
+              <a:rPr lang="en-US" dirty="0"/>
+              <a:t>- </a:t>
+            </a:r>
+            <a:r>
+              <a:rPr lang="en-US" b="1" dirty="0"/>
+              <a:t>X</a:t>
+            </a:r>
+            <a:r>
+              <a:rPr lang="en-US" dirty="0"/>
+              <a:t>: in avanti</a:t>
+            </a:r>
+          </a:p>
+          <a:p>
+            <a:r>
+              <a:rPr lang="en-US" dirty="0"/>
+              <a:t>- </a:t>
+            </a:r>
+            <a:r>
+              <a:rPr lang="en-US" b="1" dirty="0"/>
+              <a:t>Y</a:t>
             </a:r>
             <a:r>
               <a:rPr lang="en-US" dirty="0"/>
@@ -8303,53 +8525,6 @@
               <a:t>verticale</a:t>
             </a:r>
             <a:endParaRPr lang="en-US" dirty="0"/>
-          </a:p>
-          <a:p>
-            <a:r>
-              <a:rPr lang="en-US" dirty="0"/>
-              <a:t>- </a:t>
-            </a:r>
-            <a:r>
-              <a:rPr lang="en-US" b="1" dirty="0"/>
-              <a:t>B</a:t>
-            </a:r>
-            <a:r>
-              <a:rPr lang="en-US" dirty="0"/>
-              <a:t>: </a:t>
-            </a:r>
-            <a:r>
-              <a:rPr lang="en-US" dirty="0" err="1"/>
-              <a:t>ripiegato</a:t>
-            </a:r>
-            <a:endParaRPr lang="en-US" dirty="0"/>
-          </a:p>
-          <a:p>
-            <a:r>
-              <a:rPr lang="en-US" dirty="0"/>
-              <a:t>- </a:t>
-            </a:r>
-            <a:r>
-              <a:rPr lang="en-US" b="1" dirty="0"/>
-              <a:t>X</a:t>
-            </a:r>
-            <a:r>
-              <a:rPr lang="en-US" dirty="0"/>
-              <a:t>: in avanti</a:t>
-            </a:r>
-          </a:p>
-          <a:p>
-            <a:r>
-              <a:rPr lang="en-US" dirty="0"/>
-              <a:t>- </a:t>
-            </a:r>
-            <a:r>
-              <a:rPr lang="en-US" b="1" dirty="0"/>
-              <a:t>Y</a:t>
-            </a:r>
-            <a:r>
-              <a:rPr lang="en-US" dirty="0"/>
-              <a:t>: libero</a:t>
-            </a:r>
           </a:p>
         </p:txBody>
       </p:sp>
